--- a/Assets/ESL_lecture_IND_TMT_Khin.pptx
+++ b/Assets/ESL_lecture_IND_TMT_Khin.pptx
@@ -5642,7 +5642,7 @@
 </file>
 
 <file path=ppt/slides/slide10.xml><?xml version="1.0" encoding="utf-8"?>
-<p:sld xmlns:a="http://schemas.openxmlformats.org/drawingml/2006/main" xmlns:r="http://schemas.openxmlformats.org/officeDocument/2006/relationships" xmlns:p="http://schemas.openxmlformats.org/presentationml/2006/main">
+<p:sld xmlns:a="http://schemas.openxmlformats.org/drawingml/2006/main" xmlns:r="http://schemas.openxmlformats.org/officeDocument/2006/relationships" xmlns:p="http://schemas.openxmlformats.org/presentationml/2006/main" show="0">
   <p:cSld>
     <p:spTree>
       <p:nvGrpSpPr>
@@ -9391,7 +9391,7 @@
 </file>
 
 <file path=ppt/slides/slide14.xml><?xml version="1.0" encoding="utf-8"?>
-<p:sld xmlns:a="http://schemas.openxmlformats.org/drawingml/2006/main" xmlns:r="http://schemas.openxmlformats.org/officeDocument/2006/relationships" xmlns:p="http://schemas.openxmlformats.org/presentationml/2006/main">
+<p:sld xmlns:a="http://schemas.openxmlformats.org/drawingml/2006/main" xmlns:r="http://schemas.openxmlformats.org/officeDocument/2006/relationships" xmlns:p="http://schemas.openxmlformats.org/presentationml/2006/main" show="0">
   <p:cSld>
     <p:spTree>
       <p:nvGrpSpPr>
@@ -10508,7 +10508,7 @@
 </file>
 
 <file path=ppt/slides/slide15.xml><?xml version="1.0" encoding="utf-8"?>
-<p:sld xmlns:a="http://schemas.openxmlformats.org/drawingml/2006/main" xmlns:r="http://schemas.openxmlformats.org/officeDocument/2006/relationships" xmlns:p="http://schemas.openxmlformats.org/presentationml/2006/main">
+<p:sld xmlns:a="http://schemas.openxmlformats.org/drawingml/2006/main" xmlns:r="http://schemas.openxmlformats.org/officeDocument/2006/relationships" xmlns:p="http://schemas.openxmlformats.org/presentationml/2006/main" show="0">
   <p:cSld>
     <p:spTree>
       <p:nvGrpSpPr>
@@ -16526,7 +16526,7 @@
         </p:nvSpPr>
         <p:spPr>
           <a:xfrm>
-            <a:off x="4755544" y="2112685"/>
+            <a:off x="4469290" y="1676599"/>
             <a:ext cx="4388456" cy="677108"/>
           </a:xfrm>
           <a:prstGeom prst="rect">
@@ -16671,7 +16671,7 @@
         </p:blipFill>
         <p:spPr bwMode="auto">
           <a:xfrm>
-            <a:off x="209121" y="1713575"/>
+            <a:off x="139650" y="1713576"/>
             <a:ext cx="4329640" cy="2441782"/>
           </a:xfrm>
           <a:prstGeom prst="rect">
@@ -16721,114 +16721,6 @@
               <a:rPr lang="en-GB" sz="700" dirty="0"/>
               <a:t>[Credit: USA TODAY NEWS]</a:t>
             </a:r>
-          </a:p>
-        </p:txBody>
-      </p:sp>
-      <p:sp>
-        <p:nvSpPr>
-          <p:cNvPr id="11" name="Isosceles Triangle 10">
-            <a:extLst>
-              <a:ext uri="{FF2B5EF4-FFF2-40B4-BE49-F238E27FC236}">
-                <a16:creationId xmlns:a16="http://schemas.microsoft.com/office/drawing/2014/main" id="{73C5CF35-6037-4B2D-A450-7943D2BAB8E5}"/>
-              </a:ext>
-            </a:extLst>
-          </p:cNvPr>
-          <p:cNvSpPr/>
-          <p:nvPr/>
-        </p:nvSpPr>
-        <p:spPr>
-          <a:xfrm rot="2507478">
-            <a:off x="4122784" y="1078484"/>
-            <a:ext cx="964913" cy="1034045"/>
-          </a:xfrm>
-          <a:prstGeom prst="triangle">
-            <a:avLst/>
-          </a:prstGeom>
-          <a:solidFill>
-            <a:schemeClr val="bg1"/>
-          </a:solidFill>
-          <a:ln>
-            <a:solidFill>
-              <a:schemeClr val="bg1"/>
-            </a:solidFill>
-          </a:ln>
-        </p:spPr>
-        <p:style>
-          <a:lnRef idx="2">
-            <a:schemeClr val="accent1">
-              <a:shade val="50000"/>
-            </a:schemeClr>
-          </a:lnRef>
-          <a:fillRef idx="1">
-            <a:schemeClr val="accent1"/>
-          </a:fillRef>
-          <a:effectRef idx="0">
-            <a:schemeClr val="accent1"/>
-          </a:effectRef>
-          <a:fontRef idx="minor">
-            <a:schemeClr val="lt1"/>
-          </a:fontRef>
-        </p:style>
-        <p:txBody>
-          <a:bodyPr rtlCol="0" anchor="ctr"/>
-          <a:lstStyle/>
-          <a:p>
-            <a:pPr algn="ctr"/>
-            <a:endParaRPr lang="en-GB"/>
-          </a:p>
-        </p:txBody>
-      </p:sp>
-      <p:sp>
-        <p:nvSpPr>
-          <p:cNvPr id="12" name="Isosceles Triangle 11">
-            <a:extLst>
-              <a:ext uri="{FF2B5EF4-FFF2-40B4-BE49-F238E27FC236}">
-                <a16:creationId xmlns:a16="http://schemas.microsoft.com/office/drawing/2014/main" id="{6404ECF6-04AF-4203-A82D-708421EFB9E5}"/>
-              </a:ext>
-            </a:extLst>
-          </p:cNvPr>
-          <p:cNvSpPr/>
-          <p:nvPr/>
-        </p:nvSpPr>
-        <p:spPr>
-          <a:xfrm rot="13573580">
-            <a:off x="-229170" y="3816743"/>
-            <a:ext cx="876582" cy="677230"/>
-          </a:xfrm>
-          <a:prstGeom prst="triangle">
-            <a:avLst/>
-          </a:prstGeom>
-          <a:solidFill>
-            <a:schemeClr val="bg1"/>
-          </a:solidFill>
-          <a:ln>
-            <a:solidFill>
-              <a:schemeClr val="bg1"/>
-            </a:solidFill>
-          </a:ln>
-        </p:spPr>
-        <p:style>
-          <a:lnRef idx="2">
-            <a:schemeClr val="accent1">
-              <a:shade val="50000"/>
-            </a:schemeClr>
-          </a:lnRef>
-          <a:fillRef idx="1">
-            <a:schemeClr val="accent1"/>
-          </a:fillRef>
-          <a:effectRef idx="0">
-            <a:schemeClr val="accent1"/>
-          </a:effectRef>
-          <a:fontRef idx="minor">
-            <a:schemeClr val="lt1"/>
-          </a:fontRef>
-        </p:style>
-        <p:txBody>
-          <a:bodyPr rtlCol="0" anchor="ctr"/>
-          <a:lstStyle/>
-          <a:p>
-            <a:pPr algn="ctr"/>
-            <a:endParaRPr lang="en-GB"/>
           </a:p>
         </p:txBody>
       </p:sp>
@@ -16861,8 +16753,8 @@
         </p:blipFill>
         <p:spPr bwMode="auto">
           <a:xfrm>
-            <a:off x="4822024" y="2789793"/>
-            <a:ext cx="3996580" cy="2223738"/>
+            <a:off x="4469290" y="2353707"/>
+            <a:ext cx="4567648" cy="2541486"/>
           </a:xfrm>
           <a:prstGeom prst="rect">
             <a:avLst/>
